--- a/POSTER/Poster_EBDR_Murillo.pptx
+++ b/POSTER/Poster_EBDR_Murillo.pptx
@@ -112,25 +112,17 @@
 </p:presentation>
 </file>
 
-<file path=ppt/revisionInfo.xml><?xml version="1.0" encoding="utf-8"?>
-<p1510:revInfo xmlns:a="http://schemas.openxmlformats.org/drawingml/2006/main" xmlns:r="http://schemas.openxmlformats.org/officeDocument/2006/relationships" xmlns:p1510="http://schemas.microsoft.com/office/powerpoint/2015/10/main">
-  <p1510:revLst>
-    <p1510:client id="{532AE03E-A8A8-4995-A654-930558D71907}" v="33" dt="2026-09-12T14:07:41.709"/>
-  </p1510:revLst>
-</p1510:revInfo>
-</file>
-
 <file path=ppt/changesInfos/changesInfo1.xml><?xml version="1.0" encoding="utf-8"?>
 <pc:chgInfo xmlns:a="http://schemas.openxmlformats.org/drawingml/2006/main" xmlns:r="http://schemas.openxmlformats.org/officeDocument/2006/relationships" xmlns:ac="http://schemas.microsoft.com/office/drawing/2013/main/command" xmlns:pc="http://schemas.microsoft.com/office/powerpoint/2013/main/command">
   <pc:docChgLst>
     <pc:chgData name="Murillo Álvaro Borges de Sousa" userId="02386067-c46f-46e6-bf61-8f6a774af0e5" providerId="ADAL" clId="{73C3FE35-BF7E-418C-A7F8-FA0AB4F63A6B}"/>
     <pc:docChg chg="undo redo custSel modSld">
-      <pc:chgData name="Murillo Álvaro Borges de Sousa" userId="02386067-c46f-46e6-bf61-8f6a774af0e5" providerId="ADAL" clId="{73C3FE35-BF7E-418C-A7F8-FA0AB4F63A6B}" dt="2026-09-12T14:08:33.355" v="1647" actId="20577"/>
+      <pc:chgData name="Murillo Álvaro Borges de Sousa" userId="02386067-c46f-46e6-bf61-8f6a774af0e5" providerId="ADAL" clId="{73C3FE35-BF7E-418C-A7F8-FA0AB4F63A6B}" dt="2026-09-14T12:41:43.369" v="1650" actId="20577"/>
       <pc:docMkLst>
         <pc:docMk/>
       </pc:docMkLst>
       <pc:sldChg chg="addSp delSp modSp mod">
-        <pc:chgData name="Murillo Álvaro Borges de Sousa" userId="02386067-c46f-46e6-bf61-8f6a774af0e5" providerId="ADAL" clId="{73C3FE35-BF7E-418C-A7F8-FA0AB4F63A6B}" dt="2026-09-12T14:08:33.355" v="1647" actId="20577"/>
+        <pc:chgData name="Murillo Álvaro Borges de Sousa" userId="02386067-c46f-46e6-bf61-8f6a774af0e5" providerId="ADAL" clId="{73C3FE35-BF7E-418C-A7F8-FA0AB4F63A6B}" dt="2026-09-14T12:41:43.369" v="1650" actId="20577"/>
         <pc:sldMkLst>
           <pc:docMk/>
           <pc:sldMk cId="2488377188" sldId="262"/>
@@ -160,7 +152,7 @@
           </ac:spMkLst>
         </pc:spChg>
         <pc:spChg chg="mod">
-          <ac:chgData name="Murillo Álvaro Borges de Sousa" userId="02386067-c46f-46e6-bf61-8f6a774af0e5" providerId="ADAL" clId="{73C3FE35-BF7E-418C-A7F8-FA0AB4F63A6B}" dt="2026-09-12T12:59:22.565" v="152"/>
+          <ac:chgData name="Murillo Álvaro Borges de Sousa" userId="02386067-c46f-46e6-bf61-8f6a774af0e5" providerId="ADAL" clId="{73C3FE35-BF7E-418C-A7F8-FA0AB4F63A6B}" dt="2026-09-14T12:41:43.369" v="1650" actId="20577"/>
           <ac:spMkLst>
             <pc:docMk/>
             <pc:sldMk cId="2488377188" sldId="262"/>
@@ -213,14 +205,6 @@
             <pc:docMk/>
             <pc:sldMk cId="2488377188" sldId="262"/>
             <ac:spMk id="46" creationId="{B70637FD-856D-C141-376B-F76A8B43C93D}"/>
-          </ac:spMkLst>
-        </pc:spChg>
-        <pc:spChg chg="del mod">
-          <ac:chgData name="Murillo Álvaro Borges de Sousa" userId="02386067-c46f-46e6-bf61-8f6a774af0e5" providerId="ADAL" clId="{73C3FE35-BF7E-418C-A7F8-FA0AB4F63A6B}" dt="2026-09-12T14:00:30.657" v="1470" actId="478"/>
-          <ac:spMkLst>
-            <pc:docMk/>
-            <pc:sldMk cId="2488377188" sldId="262"/>
-            <ac:spMk id="47" creationId="{370E0CCD-723A-01DE-61D7-8A195D778A14}"/>
           </ac:spMkLst>
         </pc:spChg>
         <pc:spChg chg="mod">
@@ -295,22 +279,6 @@
             <ac:spMk id="80" creationId="{2F69CAF1-A0DF-4CB7-B8AD-05900DA0A16F}"/>
           </ac:spMkLst>
         </pc:spChg>
-        <pc:spChg chg="del mod">
-          <ac:chgData name="Murillo Álvaro Borges de Sousa" userId="02386067-c46f-46e6-bf61-8f6a774af0e5" providerId="ADAL" clId="{73C3FE35-BF7E-418C-A7F8-FA0AB4F63A6B}" dt="2026-09-12T13:08:33.942" v="285" actId="478"/>
-          <ac:spMkLst>
-            <pc:docMk/>
-            <pc:sldMk cId="2488377188" sldId="262"/>
-            <ac:spMk id="101" creationId="{65ABD986-E4D0-A547-5734-39C993E35119}"/>
-          </ac:spMkLst>
-        </pc:spChg>
-        <pc:graphicFrameChg chg="del mod">
-          <ac:chgData name="Murillo Álvaro Borges de Sousa" userId="02386067-c46f-46e6-bf61-8f6a774af0e5" providerId="ADAL" clId="{73C3FE35-BF7E-418C-A7F8-FA0AB4F63A6B}" dt="2026-09-12T13:35:56.054" v="868" actId="478"/>
-          <ac:graphicFrameMkLst>
-            <pc:docMk/>
-            <pc:sldMk cId="2488377188" sldId="262"/>
-            <ac:graphicFrameMk id="51" creationId="{87623759-8C74-9219-85DC-7381A0EA96E9}"/>
-          </ac:graphicFrameMkLst>
-        </pc:graphicFrameChg>
         <pc:picChg chg="add mod ord modCrop">
           <ac:chgData name="Murillo Álvaro Borges de Sousa" userId="02386067-c46f-46e6-bf61-8f6a774af0e5" providerId="ADAL" clId="{73C3FE35-BF7E-418C-A7F8-FA0AB4F63A6B}" dt="2026-09-12T14:08:20.339" v="1645" actId="167"/>
           <ac:picMkLst>
@@ -327,36 +295,12 @@
             <ac:picMk id="8" creationId="{35FCE507-4595-A42B-CAB3-0564D98C38BA}"/>
           </ac:picMkLst>
         </pc:picChg>
-        <pc:picChg chg="add del mod">
-          <ac:chgData name="Murillo Álvaro Borges de Sousa" userId="02386067-c46f-46e6-bf61-8f6a774af0e5" providerId="ADAL" clId="{73C3FE35-BF7E-418C-A7F8-FA0AB4F63A6B}" dt="2026-09-12T13:53:14.559" v="1047" actId="478"/>
-          <ac:picMkLst>
-            <pc:docMk/>
-            <pc:sldMk cId="2488377188" sldId="262"/>
-            <ac:picMk id="34" creationId="{AF682CC2-2807-D18D-CC3F-6E8F00A37C72}"/>
-          </ac:picMkLst>
-        </pc:picChg>
-        <pc:picChg chg="add del mod">
-          <ac:chgData name="Murillo Álvaro Borges de Sousa" userId="02386067-c46f-46e6-bf61-8f6a774af0e5" providerId="ADAL" clId="{73C3FE35-BF7E-418C-A7F8-FA0AB4F63A6B}" dt="2026-09-12T13:53:53.665" v="1052" actId="478"/>
-          <ac:picMkLst>
-            <pc:docMk/>
-            <pc:sldMk cId="2488377188" sldId="262"/>
-            <ac:picMk id="36" creationId="{8AEC4741-E8AC-8FDE-83D0-32B89A51CC3C}"/>
-          </ac:picMkLst>
-        </pc:picChg>
         <pc:picChg chg="add mod">
           <ac:chgData name="Murillo Álvaro Borges de Sousa" userId="02386067-c46f-46e6-bf61-8f6a774af0e5" providerId="ADAL" clId="{73C3FE35-BF7E-418C-A7F8-FA0AB4F63A6B}" dt="2026-09-12T14:06:20.026" v="1630" actId="1035"/>
           <ac:picMkLst>
             <pc:docMk/>
             <pc:sldMk cId="2488377188" sldId="262"/>
             <ac:picMk id="38" creationId="{672499FE-A731-7A61-C51C-5A85664CBBAF}"/>
-          </ac:picMkLst>
-        </pc:picChg>
-        <pc:picChg chg="del">
-          <ac:chgData name="Murillo Álvaro Borges de Sousa" userId="02386067-c46f-46e6-bf61-8f6a774af0e5" providerId="ADAL" clId="{73C3FE35-BF7E-418C-A7F8-FA0AB4F63A6B}" dt="2026-09-12T13:17:50.753" v="411" actId="478"/>
-          <ac:picMkLst>
-            <pc:docMk/>
-            <pc:sldMk cId="2488377188" sldId="262"/>
-            <ac:picMk id="50" creationId="{2C6A4A11-2D6F-5759-A454-0354B0018210}"/>
           </ac:picMkLst>
         </pc:picChg>
         <pc:picChg chg="add mod">
@@ -1107,12 +1051,16 @@
               </a:lnSpc>
             </a:pPr>
             <a:r>
-              <a:rPr lang="pt-BR" sz="5600" b="1" noProof="0" dirty="0">
+              <a:rPr lang="pt-BR" sz="5600" b="1" noProof="0">
                 <a:latin typeface="+mj-lt"/>
                 <a:cs typeface="Arial" panose="020B0604020202020204" pitchFamily="34" charset="0"/>
               </a:rPr>
-              <a:t>ACOPLAMENTO DINÂMICODEROTORESENGRENADOS</a:t>
+              <a:t>ACOPLAMENTO DINÂMICO DE ROTORES ENGRENADOS</a:t>
             </a:r>
+            <a:endParaRPr lang="pt-BR" sz="5600" b="1" noProof="0" dirty="0">
+              <a:latin typeface="+mj-lt"/>
+              <a:cs typeface="Arial" panose="020B0604020202020204" pitchFamily="34" charset="0"/>
+            </a:endParaRPr>
           </a:p>
           <a:p>
             <a:pPr algn="ctr">
